--- a/misc/Menu Letter 8.5 by 11 on 12-12-24/2_Letter_DaBeast Services Menu.pptx
+++ b/misc/Menu Letter 8.5 by 11 on 12-12-24/2_Letter_DaBeast Services Menu.pptx
@@ -21,7 +21,7 @@
       <p:boldItalic r:id="rId7"/>
     </p:embeddedFont>
     <p:embeddedFont>
-      <p:font typeface="Open Sans" panose="020B0604020202020204" charset="0"/>
+      <p:font typeface="Open Sans" panose="020F0502020204030204" pitchFamily="34" charset="0"/>
       <p:regular r:id="rId8"/>
       <p:bold r:id="rId9"/>
       <p:italic r:id="rId10"/>
@@ -16283,121 +16283,6 @@
       </p:sp>
       <p:sp>
         <p:nvSpPr>
-          <p:cNvPr id="12" name="Google Shape;101;p13">
-            <a:extLst>
-              <a:ext uri="{FF2B5EF4-FFF2-40B4-BE49-F238E27FC236}">
-                <a16:creationId xmlns:a16="http://schemas.microsoft.com/office/drawing/2014/main" id="{3E7CA357-BF9A-46AA-B7D5-7CEBF5ED5987}"/>
-              </a:ext>
-            </a:extLst>
-          </p:cNvPr>
-          <p:cNvSpPr txBox="1"/>
-          <p:nvPr/>
-        </p:nvSpPr>
-        <p:spPr>
-          <a:xfrm>
-            <a:off x="170226" y="9638223"/>
-            <a:ext cx="3438300" cy="378900"/>
-          </a:xfrm>
-          <a:prstGeom prst="rect">
-            <a:avLst/>
-          </a:prstGeom>
-          <a:noFill/>
-          <a:ln>
-            <a:noFill/>
-          </a:ln>
-        </p:spPr>
-        <p:txBody>
-          <a:bodyPr spcFirstLastPara="1" wrap="square" lIns="100775" tIns="50375" rIns="100775" bIns="50375" anchor="t" anchorCtr="0">
-            <a:spAutoFit/>
-          </a:bodyPr>
-          <a:lstStyle/>
-          <a:p>
-            <a:pPr marL="0" marR="0" lvl="0" indent="0" algn="ctr" rtl="0">
-              <a:lnSpc>
-                <a:spcPct val="100000"/>
-              </a:lnSpc>
-              <a:spcBef>
-                <a:spcPts val="0"/>
-              </a:spcBef>
-              <a:spcAft>
-                <a:spcPts val="0"/>
-              </a:spcAft>
-              <a:buClr>
-                <a:srgbClr val="000000"/>
-              </a:buClr>
-              <a:buSzPts val="1800"/>
-              <a:buFont typeface="Arial"/>
-              <a:buNone/>
-            </a:pPr>
-            <a:r>
-              <a:rPr lang="en-US" sz="1800" b="0" i="1" u="none" strike="noStrike" cap="none" dirty="0">
-                <a:solidFill>
-                  <a:srgbClr val="8CD872"/>
-                </a:solidFill>
-                <a:uFill>
-                  <a:noFill/>
-                </a:uFill>
-                <a:latin typeface="Arial"/>
-                <a:ea typeface="Arial"/>
-                <a:cs typeface="Arial"/>
-                <a:sym typeface="Arial"/>
-                <a:hlinkClick r:id="rId4">
-                  <a:extLst>
-                    <a:ext uri="{A12FA001-AC4F-418D-AE19-62706E023703}">
-                      <ahyp:hlinkClr xmlns:ahyp="http://schemas.microsoft.com/office/drawing/2018/hyperlinkcolor" val="tx"/>
-                    </a:ext>
-                  </a:extLst>
-                </a:hlinkClick>
-              </a:rPr>
-              <a:t>https://dabeastservices.com</a:t>
-            </a:r>
-            <a:endParaRPr sz="1800" b="0" i="1" u="none" strike="noStrike" cap="none" dirty="0">
-              <a:solidFill>
-                <a:srgbClr val="8CD872"/>
-              </a:solidFill>
-              <a:latin typeface="Arial"/>
-              <a:ea typeface="Arial"/>
-              <a:cs typeface="Arial"/>
-              <a:sym typeface="Arial"/>
-            </a:endParaRPr>
-          </a:p>
-        </p:txBody>
-      </p:sp>
-      <p:pic>
-        <p:nvPicPr>
-          <p:cNvPr id="13" name="Google Shape;100;p13" descr="A qr code with black squares&#10;&#10;Description automatically generated">
-            <a:extLst>
-              <a:ext uri="{FF2B5EF4-FFF2-40B4-BE49-F238E27FC236}">
-                <a16:creationId xmlns:a16="http://schemas.microsoft.com/office/drawing/2014/main" id="{DD136230-5AAF-4830-9699-B2C5E06424FE}"/>
-              </a:ext>
-            </a:extLst>
-          </p:cNvPr>
-          <p:cNvPicPr preferRelativeResize="0"/>
-          <p:nvPr/>
-        </p:nvPicPr>
-        <p:blipFill rotWithShape="1">
-          <a:blip r:embed="rId5">
-            <a:alphaModFix/>
-          </a:blip>
-          <a:srcRect/>
-          <a:stretch/>
-        </p:blipFill>
-        <p:spPr>
-          <a:xfrm>
-            <a:off x="1436019" y="8817691"/>
-            <a:ext cx="782375" cy="782375"/>
-          </a:xfrm>
-          <a:prstGeom prst="rect">
-            <a:avLst/>
-          </a:prstGeom>
-          <a:noFill/>
-          <a:ln>
-            <a:noFill/>
-          </a:ln>
-        </p:spPr>
-      </p:pic>
-      <p:sp>
-        <p:nvSpPr>
           <p:cNvPr id="14" name="Google Shape;91;p1">
             <a:extLst>
               <a:ext uri="{FF2B5EF4-FFF2-40B4-BE49-F238E27FC236}">
@@ -17845,6 +17730,223 @@
           </p:sp>
         </p:grpSp>
       </p:grpSp>
+      <p:sp>
+        <p:nvSpPr>
+          <p:cNvPr id="4" name="Google Shape;101;p13">
+            <a:extLst>
+              <a:ext uri="{FF2B5EF4-FFF2-40B4-BE49-F238E27FC236}">
+                <a16:creationId xmlns:a16="http://schemas.microsoft.com/office/drawing/2014/main" id="{E30ABE35-D4FA-EE83-1960-A049AB8CCF0F}"/>
+              </a:ext>
+            </a:extLst>
+          </p:cNvPr>
+          <p:cNvSpPr txBox="1"/>
+          <p:nvPr/>
+        </p:nvSpPr>
+        <p:spPr>
+          <a:xfrm>
+            <a:off x="170226" y="9591846"/>
+            <a:ext cx="3438300" cy="378900"/>
+          </a:xfrm>
+          <a:prstGeom prst="rect">
+            <a:avLst/>
+          </a:prstGeom>
+          <a:noFill/>
+          <a:ln>
+            <a:noFill/>
+          </a:ln>
+        </p:spPr>
+        <p:txBody>
+          <a:bodyPr spcFirstLastPara="1" wrap="square" lIns="100775" tIns="50375" rIns="100775" bIns="50375" anchor="t" anchorCtr="0">
+            <a:spAutoFit/>
+          </a:bodyPr>
+          <a:lstStyle/>
+          <a:p>
+            <a:pPr marL="0" marR="0" lvl="0" indent="0" algn="ctr" rtl="0">
+              <a:lnSpc>
+                <a:spcPct val="100000"/>
+              </a:lnSpc>
+              <a:spcBef>
+                <a:spcPts val="0"/>
+              </a:spcBef>
+              <a:spcAft>
+                <a:spcPts val="0"/>
+              </a:spcAft>
+              <a:buClr>
+                <a:srgbClr val="000000"/>
+              </a:buClr>
+              <a:buSzPts val="1800"/>
+              <a:buFont typeface="Arial"/>
+              <a:buNone/>
+            </a:pPr>
+            <a:r>
+              <a:rPr lang="en-US" sz="1800" b="0" i="1" u="none" strike="noStrike" cap="none" dirty="0">
+                <a:solidFill>
+                  <a:srgbClr val="8CD872"/>
+                </a:solidFill>
+                <a:uFill>
+                  <a:noFill/>
+                </a:uFill>
+                <a:latin typeface="Arial"/>
+                <a:ea typeface="Arial"/>
+                <a:cs typeface="Arial"/>
+                <a:sym typeface="Arial"/>
+                <a:hlinkClick r:id="rId4">
+                  <a:extLst>
+                    <a:ext uri="{A12FA001-AC4F-418D-AE19-62706E023703}">
+                      <ahyp:hlinkClr xmlns:ahyp="http://schemas.microsoft.com/office/drawing/2018/hyperlinkcolor" val="tx"/>
+                    </a:ext>
+                  </a:extLst>
+                </a:hlinkClick>
+              </a:rPr>
+              <a:t>https://dabeastservices.com</a:t>
+            </a:r>
+            <a:endParaRPr sz="1800" b="0" i="1" u="none" strike="noStrike" cap="none" dirty="0">
+              <a:solidFill>
+                <a:srgbClr val="8CD872"/>
+              </a:solidFill>
+              <a:latin typeface="Arial"/>
+              <a:ea typeface="Arial"/>
+              <a:cs typeface="Arial"/>
+              <a:sym typeface="Arial"/>
+            </a:endParaRPr>
+          </a:p>
+        </p:txBody>
+      </p:sp>
+      <p:pic>
+        <p:nvPicPr>
+          <p:cNvPr id="5" name="Google Shape;100;p13" descr="A qr code with black squares&#10;&#10;Description automatically generated">
+            <a:extLst>
+              <a:ext uri="{FF2B5EF4-FFF2-40B4-BE49-F238E27FC236}">
+                <a16:creationId xmlns:a16="http://schemas.microsoft.com/office/drawing/2014/main" id="{FD75A8D0-5999-DBF2-CF56-E141119DE5CD}"/>
+              </a:ext>
+            </a:extLst>
+          </p:cNvPr>
+          <p:cNvPicPr preferRelativeResize="0"/>
+          <p:nvPr/>
+        </p:nvPicPr>
+        <p:blipFill rotWithShape="1">
+          <a:blip r:embed="rId5">
+            <a:alphaModFix/>
+          </a:blip>
+          <a:srcRect/>
+          <a:stretch/>
+        </p:blipFill>
+        <p:spPr>
+          <a:xfrm>
+            <a:off x="2321844" y="8808892"/>
+            <a:ext cx="782375" cy="782375"/>
+          </a:xfrm>
+          <a:prstGeom prst="rect">
+            <a:avLst/>
+          </a:prstGeom>
+          <a:noFill/>
+          <a:ln>
+            <a:noFill/>
+          </a:ln>
+        </p:spPr>
+      </p:pic>
+      <p:sp>
+        <p:nvSpPr>
+          <p:cNvPr id="6" name="Google Shape;96;p13">
+            <a:extLst>
+              <a:ext uri="{FF2B5EF4-FFF2-40B4-BE49-F238E27FC236}">
+                <a16:creationId xmlns:a16="http://schemas.microsoft.com/office/drawing/2014/main" id="{00A85C06-FB2E-820D-1C46-77DE5F7B5877}"/>
+              </a:ext>
+            </a:extLst>
+          </p:cNvPr>
+          <p:cNvSpPr txBox="1"/>
+          <p:nvPr/>
+        </p:nvSpPr>
+        <p:spPr>
+          <a:xfrm>
+            <a:off x="423698" y="8865132"/>
+            <a:ext cx="1894150" cy="609565"/>
+          </a:xfrm>
+          <a:prstGeom prst="rect">
+            <a:avLst/>
+          </a:prstGeom>
+          <a:noFill/>
+          <a:ln>
+            <a:noFill/>
+          </a:ln>
+        </p:spPr>
+        <p:txBody>
+          <a:bodyPr spcFirstLastPara="1" wrap="square" lIns="100775" tIns="50375" rIns="100775" bIns="50375" anchor="t" anchorCtr="0">
+            <a:spAutoFit/>
+          </a:bodyPr>
+          <a:lstStyle/>
+          <a:p>
+            <a:pPr>
+              <a:buSzPts val="4000"/>
+            </a:pPr>
+            <a:r>
+              <a:rPr lang="en-US" sz="1100" i="1" dirty="0">
+                <a:solidFill>
+                  <a:srgbClr val="8CD872"/>
+                </a:solidFill>
+                <a:latin typeface="Arial Narrow"/>
+                <a:sym typeface="Arial Narrow"/>
+              </a:rPr>
+              <a:t>Customer is responsible for any </a:t>
+            </a:r>
+            <a:r>
+              <a:rPr lang="en-US" sz="1100" i="1">
+                <a:solidFill>
+                  <a:srgbClr val="8CD872"/>
+                </a:solidFill>
+                <a:latin typeface="Arial Narrow"/>
+                <a:sym typeface="Arial Narrow"/>
+              </a:rPr>
+              <a:t>allergen disclosures.</a:t>
+            </a:r>
+            <a:endParaRPr lang="en-US" sz="1100" i="1" dirty="0">
+              <a:solidFill>
+                <a:srgbClr val="8CD872"/>
+              </a:solidFill>
+              <a:latin typeface="Arial Narrow"/>
+              <a:sym typeface="Arial Narrow"/>
+            </a:endParaRPr>
+          </a:p>
+          <a:p>
+            <a:pPr marL="0" marR="0" lvl="0" indent="0" algn="l" rtl="0">
+              <a:lnSpc>
+                <a:spcPct val="100000"/>
+              </a:lnSpc>
+              <a:spcBef>
+                <a:spcPts val="0"/>
+              </a:spcBef>
+              <a:spcAft>
+                <a:spcPts val="0"/>
+              </a:spcAft>
+              <a:buClr>
+                <a:srgbClr val="000000"/>
+              </a:buClr>
+              <a:buSzPts val="4000"/>
+              <a:buFont typeface="Arial"/>
+              <a:buNone/>
+            </a:pPr>
+            <a:r>
+              <a:rPr lang="en-US" sz="1100" i="1" dirty="0">
+                <a:solidFill>
+                  <a:srgbClr val="8CD872"/>
+                </a:solidFill>
+                <a:latin typeface="Arial Narrow"/>
+                <a:sym typeface="Arial Narrow"/>
+              </a:rPr>
+              <a:t>Listed prices are the cash price.</a:t>
+            </a:r>
+            <a:endParaRPr lang="en-US" sz="1100" i="1" u="none" strike="noStrike" cap="none" dirty="0">
+              <a:solidFill>
+                <a:srgbClr val="8CD872"/>
+              </a:solidFill>
+              <a:latin typeface="Arial Narrow"/>
+              <a:ea typeface="Arial"/>
+              <a:cs typeface="Arial"/>
+              <a:sym typeface="Arial Narrow"/>
+            </a:endParaRPr>
+          </a:p>
+        </p:txBody>
+      </p:sp>
     </p:spTree>
   </p:cSld>
   <p:clrMapOvr>
